--- a/slides/computerScience_day6.pptx
+++ b/slides/computerScience_day6.pptx
@@ -8867,13 +8867,13 @@
         </p:nvSpPr>
         <p:spPr>
           <a:xfrm>
-            <a:off x="1355270" y="1825625"/>
-            <a:ext cx="10191504" cy="4351338"/>
+            <a:off x="1355270" y="1825624"/>
+            <a:ext cx="10191504" cy="4885141"/>
           </a:xfrm>
         </p:spPr>
         <p:txBody>
           <a:bodyPr>
-            <a:normAutofit fontScale="70000" lnSpcReduction="20000"/>
+            <a:normAutofit fontScale="85000" lnSpcReduction="20000"/>
           </a:bodyPr>
           <a:lstStyle/>
           <a:p>
@@ -8883,7 +8883,15 @@
             </a:r>
             <a:r>
               <a:rPr lang="ja-JP" altLang="en-US" dirty="0"/>
-              <a:t>個のノートを配布しています</a:t>
+              <a:t>個のノートを配布しています。最低</a:t>
+            </a:r>
+            <a:r>
+              <a:rPr lang="en-US" altLang="ja-JP" dirty="0"/>
+              <a:t>3</a:t>
+            </a:r>
+            <a:r>
+              <a:rPr lang="ja-JP" altLang="en-US" dirty="0"/>
+              <a:t>個は提出してください。</a:t>
             </a:r>
           </a:p>
           <a:p>
@@ -9052,11 +9060,11 @@
           <a:p>
             <a:pPr lvl="1"/>
             <a:r>
-              <a:rPr kumimoji="1" lang="en-US" altLang="ja-JP"/>
+              <a:rPr kumimoji="1" lang="en-US" altLang="ja-JP" dirty="0"/>
               <a:t>[</a:t>
             </a:r>
             <a:r>
-              <a:rPr kumimoji="1" lang="en-US" altLang="ja-JP">
+              <a:rPr kumimoji="1" lang="en-US" altLang="ja-JP" dirty="0">
                 <a:solidFill>
                   <a:schemeClr val="accent1"/>
                 </a:solidFill>
@@ -9065,7 +9073,7 @@
               <a:t>25</a:t>
             </a:r>
             <a:r>
-              <a:rPr kumimoji="1" lang="en-US" altLang="ja-JP">
+              <a:rPr kumimoji="1" lang="en-US" altLang="ja-JP" dirty="0">
                 <a:latin typeface="+mj-lt"/>
               </a:rPr>
               <a:t>-day06hw</a:t>
@@ -9129,7 +9137,7 @@
           <a:p>
             <a:r>
               <a:rPr lang="ja-JP" altLang="en-US" dirty="0"/>
-              <a:t>テキスト欄は適宜追加しても構わない</a:t>
+              <a:t>テキスト欄は適宜追加しても構いません</a:t>
             </a:r>
           </a:p>
         </p:txBody>

--- a/slides/computerScience_day6.pptx
+++ b/slides/computerScience_day6.pptx
@@ -5803,7 +5803,7 @@
             <p:ph idx="1"/>
             <p:extLst>
               <p:ext uri="{D42A27DB-BD31-4B8C-83A1-F6EECF244321}">
-                <p14:modId xmlns:p14="http://schemas.microsoft.com/office/powerpoint/2010/main" val="2490772027"/>
+                <p14:modId xmlns:p14="http://schemas.microsoft.com/office/powerpoint/2010/main" val="3318260521"/>
               </p:ext>
             </p:extLst>
           </p:nvPr>
@@ -6380,7 +6380,7 @@
                       </a:pPr>
                       <a:r>
                         <a:rPr kumimoji="1" lang="ja-JP" altLang="en-US" sz="1600" dirty="0"/>
-                        <a:t>・・・・</a:t>
+                        <a:t>＜お休み＞</a:t>
                       </a:r>
                     </a:p>
                   </a:txBody>
@@ -6467,7 +6467,7 @@
                     <a:p>
                       <a:r>
                         <a:rPr kumimoji="1" lang="ja-JP" altLang="en-US" sz="1600" dirty="0"/>
-                        <a:t>機械学習</a:t>
+                        <a:t>機械学習の様々なアルゴリズム</a:t>
                       </a:r>
                     </a:p>
                   </a:txBody>
@@ -6540,9 +6540,16 @@
                             <a:schemeClr val="accent5"/>
                           </a:solidFill>
                         </a:rPr>
-                        <a:t>演習</a:t>
+                        <a:t>演習　</a:t>
                       </a:r>
-                      <a:endParaRPr kumimoji="1" lang="ja-JP" altLang="en-US" sz="1600" dirty="0"/>
+                      <a:r>
+                        <a:rPr kumimoji="1" lang="ja-JP" altLang="en-US" sz="1600" dirty="0">
+                          <a:solidFill>
+                            <a:schemeClr val="accent1"/>
+                          </a:solidFill>
+                        </a:rPr>
+                        <a:t>＋最終レポート出題</a:t>
+                      </a:r>
                     </a:p>
                   </a:txBody>
                   <a:tcPr/>
@@ -8649,7 +8656,7 @@
           <a:p>
             <a:r>
               <a:rPr lang="en-US" altLang="ja-JP" dirty="0"/>
-              <a:t>Day05</a:t>
+              <a:t>Day06</a:t>
             </a:r>
             <a:r>
               <a:rPr lang="ja-JP" altLang="en-US" dirty="0"/>
@@ -8657,7 +8664,7 @@
             </a:r>
             <a:r>
               <a:rPr lang="en-US" altLang="ja-JP" dirty="0"/>
-              <a:t>Day06</a:t>
+              <a:t>Day07</a:t>
             </a:r>
             <a:endParaRPr lang="ja-JP" altLang="en-US" dirty="0"/>
           </a:p>
@@ -8867,7 +8874,7 @@
         </p:nvSpPr>
         <p:spPr>
           <a:xfrm>
-            <a:off x="1355270" y="1825624"/>
+            <a:off x="1355270" y="1810126"/>
             <a:ext cx="10191504" cy="4885141"/>
           </a:xfrm>
         </p:spPr>
